--- a/dist/초5/과학/지층과빛/초5_과학_지층과빛_01_지층과화석.pptx
+++ b/dist/초5/과학/지층과빛/초5_과학_지층과빛_01_지층과화석.pptx
@@ -126,13 +126,13 @@
   <p:extLst>
     <p:ext uri="{521415D9-36F7-43E2-AB2F-B90AF26B5E84}">
       <p14:sectionLst xmlns:p14="http://schemas.microsoft.com/office/powerpoint/2010/main">
-        <p14:section name="도입" id="{97992b7a-36c2-733f-d1ed-81c494e06294}">
+        <p14:section name="도입" id="{39693bff-279e-477c-26af-0ed104830ec1}">
           <p14:sldIdLst>
             <p14:sldId id="256"/>
             <p14:sldId id="257"/>
           </p14:sldIdLst>
         </p14:section>
-        <p14:section name="연습" id="{31a62b8f-2f6a-094f-1c54-367d992ba709}">
+        <p14:section name="연습" id="{84791554-c992-6ed6-017e-f09e90212112}">
           <p14:sldIdLst>
             <p14:sldId id="258"/>
             <p14:sldId id="259"/>
@@ -146,41 +146,41 @@
             <p14:sldId id="270"/>
           </p14:sldIdLst>
         </p14:section>
-        <p14:section name="개념" id="{1df890a7-5a5e-3156-e668-cd8965135692}">
+        <p14:section name="개념" id="{feeb4bc5-f6bf-070a-2511-013f5645a0ff}">
           <p14:sldIdLst>
             <p14:sldId id="261"/>
             <p14:sldId id="263"/>
             <p14:sldId id="269"/>
           </p14:sldIdLst>
         </p14:section>
-        <p14:section name="연습" id="{0d5472bf-a1ab-07ad-6c5d-6370bc48ab33}">
+        <p14:section name="연습" id="{ba9894c8-fbbb-feca-72d8-246681601bb8}">
           <p14:sldIdLst/>
         </p14:section>
-        <p14:section name="개념" id="{82f99d17-c28b-1081-ea1f-e9b860880edf}">
+        <p14:section name="개념" id="{38acd824-9347-2dce-1bc2-d1ef6c4952c4}">
           <p14:sldIdLst/>
         </p14:section>
-        <p14:section name="연습" id="{2677d9ab-6e26-cec3-93ff-17a629dbcec5}">
+        <p14:section name="연습" id="{be750dd2-e472-b648-8f14-660584cd65bf}">
           <p14:sldIdLst/>
         </p14:section>
-        <p14:section name="개념" id="{beb91ddd-a18b-4571-354c-46d9162bfd3f}">
+        <p14:section name="개념" id="{333245d8-982e-5f95-12d1-bbb8531e3965}">
           <p14:sldIdLst/>
         </p14:section>
-        <p14:section name="연습" id="{eb042742-441e-9be0-e6e6-f710d6a3f2b4}">
+        <p14:section name="연습" id="{79268601-444f-8122-e554-56092f00ad8a}">
           <p14:sldIdLst/>
         </p14:section>
-        <p14:section name="확인" id="{5fe317c2-1201-6c88-b100-364c0c11afbd}">
+        <p14:section name="확인" id="{d12d1620-ff1c-5098-3c4b-d8c8929993d8}">
           <p14:sldIdLst>
             <p14:sldId id="271"/>
             <p14:sldId id="272"/>
             <p14:sldId id="273"/>
           </p14:sldIdLst>
         </p14:section>
-        <p14:section name="정리" id="{4b7f6d04-f1d6-5edf-f5e0-6c8354e76e47}">
+        <p14:section name="정리" id="{d1096579-3b80-846d-97c1-171059427ac1}">
           <p14:sldIdLst>
             <p14:sldId id="274"/>
           </p14:sldIdLst>
         </p14:section>
-        <p14:section name="보충" id="{697fd469-766f-004f-1c17-7203594ff823}">
+        <p14:section name="보충" id="{99abf685-d3b8-7d36-0123-81f928c8a8d2}">
           <p14:sldIdLst>
             <p14:sldId id="275"/>
           </p14:sldIdLst>
